--- a/宣道詩/(宣道詩45 A-B)誇十字架.pptx
+++ b/宣道詩/(宣道詩45 A-B)誇十字架.pptx
@@ -5,16 +5,21 @@
     <p:sldMasterId id="2147483660" r:id="rId1"/>
   </p:sldMasterIdLst>
   <p:notesMasterIdLst>
-    <p:notesMasterId r:id="rId6"/>
+    <p:notesMasterId r:id="rId11"/>
   </p:notesMasterIdLst>
   <p:handoutMasterIdLst>
-    <p:handoutMasterId r:id="rId7"/>
+    <p:handoutMasterId r:id="rId12"/>
   </p:handoutMasterIdLst>
   <p:sldIdLst>
-    <p:sldId id="1600" r:id="rId2"/>
-    <p:sldId id="1601" r:id="rId3"/>
-    <p:sldId id="1602" r:id="rId4"/>
-    <p:sldId id="1603" r:id="rId5"/>
+    <p:sldId id="391" r:id="rId2"/>
+    <p:sldId id="412" r:id="rId3"/>
+    <p:sldId id="509" r:id="rId4"/>
+    <p:sldId id="510" r:id="rId5"/>
+    <p:sldId id="511" r:id="rId6"/>
+    <p:sldId id="512" r:id="rId7"/>
+    <p:sldId id="513" r:id="rId8"/>
+    <p:sldId id="514" r:id="rId9"/>
+    <p:sldId id="515" r:id="rId10"/>
   </p:sldIdLst>
   <p:sldSz cx="12192000" cy="6858000"/>
   <p:notesSz cx="6858000" cy="9144000"/>
@@ -313,6 +318,11 @@
         </p:txBody>
       </p:sp>
     </p:spTree>
+    <p:extLst>
+      <p:ext uri="{BB962C8B-B14F-4D97-AF65-F5344CB8AC3E}">
+        <p14:creationId xmlns:p14="http://schemas.microsoft.com/office/powerpoint/2010/main" val="1"/>
+      </p:ext>
+    </p:extLst>
   </p:cSld>
   <p:clrMap bg1="lt1" tx1="dk1" bg2="lt2" tx2="dk2" accent1="accent1" accent2="accent2" accent3="accent3" accent4="accent4" accent5="accent5" accent6="accent6" hlink="hlink" folHlink="folHlink"/>
 </p:handoutMaster>
@@ -462,38 +472,37 @@
           <a:p>
             <a:pPr lvl="0"/>
             <a:r>
-              <a:rPr lang="zh-TW" altLang="en-US" smtClean="0"/>
+              <a:rPr lang="zh-TW" altLang="en-US"/>
               <a:t>按一下以編輯母片文字樣式</a:t>
             </a:r>
           </a:p>
           <a:p>
             <a:pPr lvl="1"/>
             <a:r>
-              <a:rPr lang="zh-TW" altLang="en-US" smtClean="0"/>
+              <a:rPr lang="zh-TW" altLang="en-US"/>
               <a:t>第二層</a:t>
             </a:r>
           </a:p>
           <a:p>
             <a:pPr lvl="2"/>
             <a:r>
-              <a:rPr lang="zh-TW" altLang="en-US" smtClean="0"/>
+              <a:rPr lang="zh-TW" altLang="en-US"/>
               <a:t>第三層</a:t>
             </a:r>
           </a:p>
           <a:p>
             <a:pPr lvl="3"/>
             <a:r>
-              <a:rPr lang="zh-TW" altLang="en-US" smtClean="0"/>
+              <a:rPr lang="zh-TW" altLang="en-US"/>
               <a:t>第四層</a:t>
             </a:r>
           </a:p>
           <a:p>
             <a:pPr lvl="4"/>
             <a:r>
-              <a:rPr lang="zh-TW" altLang="en-US" smtClean="0"/>
+              <a:rPr lang="zh-TW" altLang="en-US"/>
               <a:t>第五層</a:t>
             </a:r>
-            <a:endParaRPr lang="zh-TW" altLang="en-US"/>
           </a:p>
         </p:txBody>
       </p:sp>
@@ -699,7 +708,7 @@
           <a:lstStyle/>
           <a:p>
             <a:r>
-              <a:rPr lang="en-US" altLang="zh-TW" smtClean="0"/>
+              <a:rPr lang="en-US" altLang="zh-TW"/>
               <a:t>Click to edit Master title style</a:t>
             </a:r>
             <a:endParaRPr lang="zh-TW" altLang="en-US"/>
@@ -818,7 +827,7 @@
           </a:lstStyle>
           <a:p>
             <a:r>
-              <a:rPr lang="en-US" altLang="zh-TW" smtClean="0"/>
+              <a:rPr lang="en-US" altLang="zh-TW"/>
               <a:t>Click to edit Master subtitle style</a:t>
             </a:r>
             <a:endParaRPr lang="zh-TW" altLang="en-US"/>
@@ -941,7 +950,7 @@
           <a:lstStyle/>
           <a:p>
             <a:r>
-              <a:rPr lang="en-US" altLang="zh-TW" smtClean="0"/>
+              <a:rPr lang="en-US" altLang="zh-TW"/>
               <a:t>Click to edit Master title style</a:t>
             </a:r>
             <a:endParaRPr lang="zh-TW" altLang="en-US"/>
@@ -965,35 +974,35 @@
           <a:p>
             <a:pPr lvl="0"/>
             <a:r>
-              <a:rPr lang="en-US" altLang="zh-TW" smtClean="0"/>
+              <a:rPr lang="en-US" altLang="zh-TW"/>
               <a:t>Edit Master text styles</a:t>
             </a:r>
           </a:p>
           <a:p>
             <a:pPr lvl="1"/>
             <a:r>
-              <a:rPr lang="en-US" altLang="zh-TW" smtClean="0"/>
+              <a:rPr lang="en-US" altLang="zh-TW"/>
               <a:t>Second level</a:t>
             </a:r>
           </a:p>
           <a:p>
             <a:pPr lvl="2"/>
             <a:r>
-              <a:rPr lang="en-US" altLang="zh-TW" smtClean="0"/>
+              <a:rPr lang="en-US" altLang="zh-TW"/>
               <a:t>Third level</a:t>
             </a:r>
           </a:p>
           <a:p>
             <a:pPr lvl="3"/>
             <a:r>
-              <a:rPr lang="en-US" altLang="zh-TW" smtClean="0"/>
+              <a:rPr lang="en-US" altLang="zh-TW"/>
               <a:t>Fourth level</a:t>
             </a:r>
           </a:p>
           <a:p>
             <a:pPr lvl="4"/>
             <a:r>
-              <a:rPr lang="en-US" altLang="zh-TW" smtClean="0"/>
+              <a:rPr lang="en-US" altLang="zh-TW"/>
               <a:t>Fifth level</a:t>
             </a:r>
             <a:endParaRPr lang="zh-TW" altLang="en-US"/>
@@ -1121,7 +1130,7 @@
           <a:lstStyle/>
           <a:p>
             <a:r>
-              <a:rPr lang="en-US" altLang="zh-TW" smtClean="0"/>
+              <a:rPr lang="en-US" altLang="zh-TW"/>
               <a:t>Click to edit Master title style</a:t>
             </a:r>
             <a:endParaRPr lang="zh-TW" altLang="en-US"/>
@@ -1150,35 +1159,35 @@
           <a:p>
             <a:pPr lvl="0"/>
             <a:r>
-              <a:rPr lang="en-US" altLang="zh-TW" smtClean="0"/>
+              <a:rPr lang="en-US" altLang="zh-TW"/>
               <a:t>Edit Master text styles</a:t>
             </a:r>
           </a:p>
           <a:p>
             <a:pPr lvl="1"/>
             <a:r>
-              <a:rPr lang="en-US" altLang="zh-TW" smtClean="0"/>
+              <a:rPr lang="en-US" altLang="zh-TW"/>
               <a:t>Second level</a:t>
             </a:r>
           </a:p>
           <a:p>
             <a:pPr lvl="2"/>
             <a:r>
-              <a:rPr lang="en-US" altLang="zh-TW" smtClean="0"/>
+              <a:rPr lang="en-US" altLang="zh-TW"/>
               <a:t>Third level</a:t>
             </a:r>
           </a:p>
           <a:p>
             <a:pPr lvl="3"/>
             <a:r>
-              <a:rPr lang="en-US" altLang="zh-TW" smtClean="0"/>
+              <a:rPr lang="en-US" altLang="zh-TW"/>
               <a:t>Fourth level</a:t>
             </a:r>
           </a:p>
           <a:p>
             <a:pPr lvl="4"/>
             <a:r>
-              <a:rPr lang="en-US" altLang="zh-TW" smtClean="0"/>
+              <a:rPr lang="en-US" altLang="zh-TW"/>
               <a:t>Fifth level</a:t>
             </a:r>
             <a:endParaRPr lang="zh-TW" altLang="en-US"/>
@@ -1301,7 +1310,7 @@
           <a:lstStyle/>
           <a:p>
             <a:r>
-              <a:rPr lang="en-US" altLang="zh-TW" smtClean="0"/>
+              <a:rPr lang="en-US" altLang="zh-TW"/>
               <a:t>Click to edit Master title style</a:t>
             </a:r>
             <a:endParaRPr lang="zh-TW" altLang="en-US"/>
@@ -1325,35 +1334,35 @@
           <a:p>
             <a:pPr lvl="0"/>
             <a:r>
-              <a:rPr lang="en-US" altLang="zh-TW" smtClean="0"/>
+              <a:rPr lang="en-US" altLang="zh-TW"/>
               <a:t>Edit Master text styles</a:t>
             </a:r>
           </a:p>
           <a:p>
             <a:pPr lvl="1"/>
             <a:r>
-              <a:rPr lang="en-US" altLang="zh-TW" smtClean="0"/>
+              <a:rPr lang="en-US" altLang="zh-TW"/>
               <a:t>Second level</a:t>
             </a:r>
           </a:p>
           <a:p>
             <a:pPr lvl="2"/>
             <a:r>
-              <a:rPr lang="en-US" altLang="zh-TW" smtClean="0"/>
+              <a:rPr lang="en-US" altLang="zh-TW"/>
               <a:t>Third level</a:t>
             </a:r>
           </a:p>
           <a:p>
             <a:pPr lvl="3"/>
             <a:r>
-              <a:rPr lang="en-US" altLang="zh-TW" smtClean="0"/>
+              <a:rPr lang="en-US" altLang="zh-TW"/>
               <a:t>Fourth level</a:t>
             </a:r>
           </a:p>
           <a:p>
             <a:pPr lvl="4"/>
             <a:r>
-              <a:rPr lang="en-US" altLang="zh-TW" smtClean="0"/>
+              <a:rPr lang="en-US" altLang="zh-TW"/>
               <a:t>Fifth level</a:t>
             </a:r>
             <a:endParaRPr lang="zh-TW" altLang="en-US"/>
@@ -1485,7 +1494,7 @@
           </a:lstStyle>
           <a:p>
             <a:r>
-              <a:rPr lang="en-US" altLang="zh-TW" smtClean="0"/>
+              <a:rPr lang="en-US" altLang="zh-TW"/>
               <a:t>Click to edit Master title style</a:t>
             </a:r>
             <a:endParaRPr lang="zh-TW" altLang="en-US"/>
@@ -1605,7 +1614,7 @@
           <a:p>
             <a:pPr lvl="0"/>
             <a:r>
-              <a:rPr lang="en-US" altLang="zh-TW" smtClean="0"/>
+              <a:rPr lang="en-US" altLang="zh-TW"/>
               <a:t>Edit Master text styles</a:t>
             </a:r>
           </a:p>
@@ -1727,7 +1736,7 @@
           <a:lstStyle/>
           <a:p>
             <a:r>
-              <a:rPr lang="en-US" altLang="zh-TW" smtClean="0"/>
+              <a:rPr lang="en-US" altLang="zh-TW"/>
               <a:t>Click to edit Master title style</a:t>
             </a:r>
             <a:endParaRPr lang="zh-TW" altLang="en-US"/>
@@ -1784,35 +1793,35 @@
           <a:p>
             <a:pPr lvl="0"/>
             <a:r>
-              <a:rPr lang="en-US" altLang="zh-TW" smtClean="0"/>
+              <a:rPr lang="en-US" altLang="zh-TW"/>
               <a:t>Edit Master text styles</a:t>
             </a:r>
           </a:p>
           <a:p>
             <a:pPr lvl="1"/>
             <a:r>
-              <a:rPr lang="en-US" altLang="zh-TW" smtClean="0"/>
+              <a:rPr lang="en-US" altLang="zh-TW"/>
               <a:t>Second level</a:t>
             </a:r>
           </a:p>
           <a:p>
             <a:pPr lvl="2"/>
             <a:r>
-              <a:rPr lang="en-US" altLang="zh-TW" smtClean="0"/>
+              <a:rPr lang="en-US" altLang="zh-TW"/>
               <a:t>Third level</a:t>
             </a:r>
           </a:p>
           <a:p>
             <a:pPr lvl="3"/>
             <a:r>
-              <a:rPr lang="en-US" altLang="zh-TW" smtClean="0"/>
+              <a:rPr lang="en-US" altLang="zh-TW"/>
               <a:t>Fourth level</a:t>
             </a:r>
           </a:p>
           <a:p>
             <a:pPr lvl="4"/>
             <a:r>
-              <a:rPr lang="en-US" altLang="zh-TW" smtClean="0"/>
+              <a:rPr lang="en-US" altLang="zh-TW"/>
               <a:t>Fifth level</a:t>
             </a:r>
             <a:endParaRPr lang="zh-TW" altLang="en-US"/>
@@ -1869,35 +1878,35 @@
           <a:p>
             <a:pPr lvl="0"/>
             <a:r>
-              <a:rPr lang="en-US" altLang="zh-TW" smtClean="0"/>
+              <a:rPr lang="en-US" altLang="zh-TW"/>
               <a:t>Edit Master text styles</a:t>
             </a:r>
           </a:p>
           <a:p>
             <a:pPr lvl="1"/>
             <a:r>
-              <a:rPr lang="en-US" altLang="zh-TW" smtClean="0"/>
+              <a:rPr lang="en-US" altLang="zh-TW"/>
               <a:t>Second level</a:t>
             </a:r>
           </a:p>
           <a:p>
             <a:pPr lvl="2"/>
             <a:r>
-              <a:rPr lang="en-US" altLang="zh-TW" smtClean="0"/>
+              <a:rPr lang="en-US" altLang="zh-TW"/>
               <a:t>Third level</a:t>
             </a:r>
           </a:p>
           <a:p>
             <a:pPr lvl="3"/>
             <a:r>
-              <a:rPr lang="en-US" altLang="zh-TW" smtClean="0"/>
+              <a:rPr lang="en-US" altLang="zh-TW"/>
               <a:t>Fourth level</a:t>
             </a:r>
           </a:p>
           <a:p>
             <a:pPr lvl="4"/>
             <a:r>
-              <a:rPr lang="en-US" altLang="zh-TW" smtClean="0"/>
+              <a:rPr lang="en-US" altLang="zh-TW"/>
               <a:t>Fifth level</a:t>
             </a:r>
             <a:endParaRPr lang="zh-TW" altLang="en-US"/>
@@ -2024,7 +2033,7 @@
           </a:lstStyle>
           <a:p>
             <a:r>
-              <a:rPr lang="en-US" altLang="zh-TW" smtClean="0"/>
+              <a:rPr lang="en-US" altLang="zh-TW"/>
               <a:t>Click to edit Master title style</a:t>
             </a:r>
             <a:endParaRPr lang="zh-TW" altLang="en-US"/>
@@ -2090,7 +2099,7 @@
           <a:p>
             <a:pPr lvl="0"/>
             <a:r>
-              <a:rPr lang="en-US" altLang="zh-TW" smtClean="0"/>
+              <a:rPr lang="en-US" altLang="zh-TW"/>
               <a:t>Edit Master text styles</a:t>
             </a:r>
           </a:p>
@@ -2146,35 +2155,35 @@
           <a:p>
             <a:pPr lvl="0"/>
             <a:r>
-              <a:rPr lang="en-US" altLang="zh-TW" smtClean="0"/>
+              <a:rPr lang="en-US" altLang="zh-TW"/>
               <a:t>Edit Master text styles</a:t>
             </a:r>
           </a:p>
           <a:p>
             <a:pPr lvl="1"/>
             <a:r>
-              <a:rPr lang="en-US" altLang="zh-TW" smtClean="0"/>
+              <a:rPr lang="en-US" altLang="zh-TW"/>
               <a:t>Second level</a:t>
             </a:r>
           </a:p>
           <a:p>
             <a:pPr lvl="2"/>
             <a:r>
-              <a:rPr lang="en-US" altLang="zh-TW" smtClean="0"/>
+              <a:rPr lang="en-US" altLang="zh-TW"/>
               <a:t>Third level</a:t>
             </a:r>
           </a:p>
           <a:p>
             <a:pPr lvl="3"/>
             <a:r>
-              <a:rPr lang="en-US" altLang="zh-TW" smtClean="0"/>
+              <a:rPr lang="en-US" altLang="zh-TW"/>
               <a:t>Fourth level</a:t>
             </a:r>
           </a:p>
           <a:p>
             <a:pPr lvl="4"/>
             <a:r>
-              <a:rPr lang="en-US" altLang="zh-TW" smtClean="0"/>
+              <a:rPr lang="en-US" altLang="zh-TW"/>
               <a:t>Fifth level</a:t>
             </a:r>
             <a:endParaRPr lang="zh-TW" altLang="en-US"/>
@@ -2240,7 +2249,7 @@
           <a:p>
             <a:pPr lvl="0"/>
             <a:r>
-              <a:rPr lang="en-US" altLang="zh-TW" smtClean="0"/>
+              <a:rPr lang="en-US" altLang="zh-TW"/>
               <a:t>Edit Master text styles</a:t>
             </a:r>
           </a:p>
@@ -2296,35 +2305,35 @@
           <a:p>
             <a:pPr lvl="0"/>
             <a:r>
-              <a:rPr lang="en-US" altLang="zh-TW" smtClean="0"/>
+              <a:rPr lang="en-US" altLang="zh-TW"/>
               <a:t>Edit Master text styles</a:t>
             </a:r>
           </a:p>
           <a:p>
             <a:pPr lvl="1"/>
             <a:r>
-              <a:rPr lang="en-US" altLang="zh-TW" smtClean="0"/>
+              <a:rPr lang="en-US" altLang="zh-TW"/>
               <a:t>Second level</a:t>
             </a:r>
           </a:p>
           <a:p>
             <a:pPr lvl="2"/>
             <a:r>
-              <a:rPr lang="en-US" altLang="zh-TW" smtClean="0"/>
+              <a:rPr lang="en-US" altLang="zh-TW"/>
               <a:t>Third level</a:t>
             </a:r>
           </a:p>
           <a:p>
             <a:pPr lvl="3"/>
             <a:r>
-              <a:rPr lang="en-US" altLang="zh-TW" smtClean="0"/>
+              <a:rPr lang="en-US" altLang="zh-TW"/>
               <a:t>Fourth level</a:t>
             </a:r>
           </a:p>
           <a:p>
             <a:pPr lvl="4"/>
             <a:r>
-              <a:rPr lang="en-US" altLang="zh-TW" smtClean="0"/>
+              <a:rPr lang="en-US" altLang="zh-TW"/>
               <a:t>Fifth level</a:t>
             </a:r>
             <a:endParaRPr lang="zh-TW" altLang="en-US"/>
@@ -2447,7 +2456,7 @@
           <a:lstStyle/>
           <a:p>
             <a:r>
-              <a:rPr lang="en-US" altLang="zh-TW" smtClean="0"/>
+              <a:rPr lang="en-US" altLang="zh-TW"/>
               <a:t>Click to edit Master title style</a:t>
             </a:r>
             <a:endParaRPr lang="zh-TW" altLang="en-US"/>
@@ -2679,7 +2688,7 @@
           </a:lstStyle>
           <a:p>
             <a:r>
-              <a:rPr lang="en-US" altLang="zh-TW" smtClean="0"/>
+              <a:rPr lang="en-US" altLang="zh-TW"/>
               <a:t>Click to edit Master title style</a:t>
             </a:r>
             <a:endParaRPr lang="zh-TW" altLang="en-US"/>
@@ -2736,35 +2745,35 @@
           <a:p>
             <a:pPr lvl="0"/>
             <a:r>
-              <a:rPr lang="en-US" altLang="zh-TW" smtClean="0"/>
+              <a:rPr lang="en-US" altLang="zh-TW"/>
               <a:t>Edit Master text styles</a:t>
             </a:r>
           </a:p>
           <a:p>
             <a:pPr lvl="1"/>
             <a:r>
-              <a:rPr lang="en-US" altLang="zh-TW" smtClean="0"/>
+              <a:rPr lang="en-US" altLang="zh-TW"/>
               <a:t>Second level</a:t>
             </a:r>
           </a:p>
           <a:p>
             <a:pPr lvl="2"/>
             <a:r>
-              <a:rPr lang="en-US" altLang="zh-TW" smtClean="0"/>
+              <a:rPr lang="en-US" altLang="zh-TW"/>
               <a:t>Third level</a:t>
             </a:r>
           </a:p>
           <a:p>
             <a:pPr lvl="3"/>
             <a:r>
-              <a:rPr lang="en-US" altLang="zh-TW" smtClean="0"/>
+              <a:rPr lang="en-US" altLang="zh-TW"/>
               <a:t>Fourth level</a:t>
             </a:r>
           </a:p>
           <a:p>
             <a:pPr lvl="4"/>
             <a:r>
-              <a:rPr lang="en-US" altLang="zh-TW" smtClean="0"/>
+              <a:rPr lang="en-US" altLang="zh-TW"/>
               <a:t>Fifth level</a:t>
             </a:r>
             <a:endParaRPr lang="zh-TW" altLang="en-US"/>
@@ -2830,7 +2839,7 @@
           <a:p>
             <a:pPr lvl="0"/>
             <a:r>
-              <a:rPr lang="en-US" altLang="zh-TW" smtClean="0"/>
+              <a:rPr lang="en-US" altLang="zh-TW"/>
               <a:t>Edit Master text styles</a:t>
             </a:r>
           </a:p>
@@ -2961,7 +2970,7 @@
           </a:lstStyle>
           <a:p>
             <a:r>
-              <a:rPr lang="en-US" altLang="zh-TW" smtClean="0"/>
+              <a:rPr lang="en-US" altLang="zh-TW"/>
               <a:t>Click to edit Master title style</a:t>
             </a:r>
             <a:endParaRPr lang="zh-TW" altLang="en-US"/>
@@ -3026,7 +3035,7 @@
           </a:lstStyle>
           <a:p>
             <a:r>
-              <a:rPr lang="en-US" altLang="zh-TW" smtClean="0"/>
+              <a:rPr lang="en-US" altLang="zh-TW"/>
               <a:t>Click icon to add picture</a:t>
             </a:r>
             <a:endParaRPr lang="zh-TW" altLang="en-US"/>
@@ -3092,7 +3101,7 @@
           <a:p>
             <a:pPr lvl="0"/>
             <a:r>
-              <a:rPr lang="en-US" altLang="zh-TW" smtClean="0"/>
+              <a:rPr lang="en-US" altLang="zh-TW"/>
               <a:t>Edit Master text styles</a:t>
             </a:r>
           </a:p>
@@ -3234,10 +3243,9 @@
           <a:lstStyle/>
           <a:p>
             <a:r>
-              <a:rPr lang="zh-TW" altLang="en-US" smtClean="0"/>
+              <a:rPr lang="zh-TW" altLang="en-US"/>
               <a:t>按一下以編輯母片標題樣式</a:t>
             </a:r>
-            <a:endParaRPr lang="zh-TW" altLang="en-US"/>
           </a:p>
         </p:txBody>
       </p:sp>
@@ -3268,38 +3276,37 @@
           <a:p>
             <a:pPr lvl="0"/>
             <a:r>
-              <a:rPr lang="zh-TW" altLang="en-US" smtClean="0"/>
+              <a:rPr lang="zh-TW" altLang="en-US"/>
               <a:t>按一下以編輯母片文字樣式</a:t>
             </a:r>
           </a:p>
           <a:p>
             <a:pPr lvl="1"/>
             <a:r>
-              <a:rPr lang="zh-TW" altLang="en-US" smtClean="0"/>
+              <a:rPr lang="zh-TW" altLang="en-US"/>
               <a:t>第二層</a:t>
             </a:r>
           </a:p>
           <a:p>
             <a:pPr lvl="2"/>
             <a:r>
-              <a:rPr lang="zh-TW" altLang="en-US" smtClean="0"/>
+              <a:rPr lang="zh-TW" altLang="en-US"/>
               <a:t>第三層</a:t>
             </a:r>
           </a:p>
           <a:p>
             <a:pPr lvl="3"/>
             <a:r>
-              <a:rPr lang="zh-TW" altLang="en-US" smtClean="0"/>
+              <a:rPr lang="zh-TW" altLang="en-US"/>
               <a:t>第四層</a:t>
             </a:r>
           </a:p>
           <a:p>
             <a:pPr lvl="4"/>
             <a:r>
-              <a:rPr lang="zh-TW" altLang="en-US" smtClean="0"/>
+              <a:rPr lang="zh-TW" altLang="en-US"/>
               <a:t>第五層</a:t>
             </a:r>
-            <a:endParaRPr lang="zh-TW" altLang="en-US"/>
           </a:p>
         </p:txBody>
       </p:sp>
@@ -3720,7 +3727,7 @@
       </p:grpSpPr>
       <p:sp>
         <p:nvSpPr>
-          <p:cNvPr id="4" name="Title 3"/>
+          <p:cNvPr id="4" name="標題 3"/>
           <p:cNvSpPr>
             <a:spLocks noGrp="1"/>
           </p:cNvSpPr>
@@ -3728,166 +3735,106 @@
             <p:ph type="title"/>
           </p:nvPr>
         </p:nvSpPr>
-        <p:spPr/>
+        <p:spPr>
+          <a:xfrm>
+            <a:off x="0" y="2660915"/>
+            <a:ext cx="12192000" cy="1143000"/>
+          </a:xfrm>
+        </p:spPr>
         <p:txBody>
           <a:bodyPr>
-            <a:normAutofit/>
+            <a:noAutofit/>
           </a:bodyPr>
           <a:lstStyle/>
           <a:p>
             <a:r>
-              <a:rPr lang="en-US" altLang="zh-CN" sz="4800" b="1" dirty="0">
+              <a:rPr lang="zh-CN" altLang="en-US" sz="5333" b="1" u="sng" dirty="0">
                 <a:solidFill>
-                  <a:srgbClr val="002060"/>
+                  <a:srgbClr val="660033"/>
                 </a:solidFill>
-                <a:latin typeface="Microsoft JhengHei" panose="020B0604030504040204" pitchFamily="34" charset="-120"/>
-                <a:ea typeface="Microsoft JhengHei" panose="020B0604030504040204" pitchFamily="34" charset="-120"/>
+                <a:effectLst>
+                  <a:outerShdw blurRad="38100" dist="38100" dir="2700000" algn="tl">
+                    <a:srgbClr val="000000">
+                      <a:alpha val="43137"/>
+                    </a:srgbClr>
+                  </a:outerShdw>
+                </a:effectLst>
+                <a:latin typeface="微軟正黑體" pitchFamily="34" charset="-120"/>
+                <a:ea typeface="微軟正黑體" pitchFamily="34" charset="-120"/>
               </a:rPr>
-              <a:t>【</a:t>
-            </a:r>
-            <a:r>
-              <a:rPr lang="zh-CN" altLang="en-US" sz="4800" b="1" dirty="0">
+              <a:t>宣道詩 </a:t>
+            </a:r>
+            <a:r>
+              <a:rPr lang="en-US" altLang="zh-CN" sz="5333" b="1" u="sng" dirty="0">
                 <a:solidFill>
-                  <a:srgbClr val="002060"/>
+                  <a:srgbClr val="660033"/>
                 </a:solidFill>
-                <a:latin typeface="Microsoft JhengHei" panose="020B0604030504040204" pitchFamily="34" charset="-120"/>
-                <a:ea typeface="Microsoft JhengHei" panose="020B0604030504040204" pitchFamily="34" charset="-120"/>
+                <a:effectLst>
+                  <a:outerShdw blurRad="38100" dist="38100" dir="2700000" algn="tl">
+                    <a:srgbClr val="000000">
+                      <a:alpha val="43137"/>
+                    </a:srgbClr>
+                  </a:outerShdw>
+                </a:effectLst>
+                <a:latin typeface="微軟正黑體" pitchFamily="34" charset="-120"/>
+                <a:ea typeface="微軟正黑體" pitchFamily="34" charset="-120"/>
+              </a:rPr>
+              <a:t>45A-B</a:t>
+            </a:r>
+            <a:br>
+              <a:rPr lang="en-US" altLang="zh-CN" sz="7200" b="1" i="1" dirty="0">
+                <a:solidFill>
+                  <a:srgbClr val="660033"/>
+                </a:solidFill>
+                <a:effectLst>
+                  <a:outerShdw blurRad="38100" dist="38100" dir="2700000" algn="tl">
+                    <a:srgbClr val="000000">
+                      <a:alpha val="43137"/>
+                    </a:srgbClr>
+                  </a:outerShdw>
+                </a:effectLst>
+                <a:latin typeface="微軟正黑體" pitchFamily="34" charset="-120"/>
+                <a:ea typeface="微軟正黑體" pitchFamily="34" charset="-120"/>
+              </a:rPr>
+            </a:br>
+            <a:r>
+              <a:rPr lang="zh-CN" altLang="en-US" sz="8000" b="1" dirty="0">
+                <a:solidFill>
+                  <a:srgbClr val="000066"/>
+                </a:solidFill>
+                <a:effectLst>
+                  <a:outerShdw blurRad="38100" dist="38100" dir="2700000" algn="tl">
+                    <a:srgbClr val="000000">
+                      <a:alpha val="43137"/>
+                    </a:srgbClr>
+                  </a:outerShdw>
+                </a:effectLst>
+                <a:latin typeface="微軟正黑體" pitchFamily="34" charset="-120"/>
+                <a:ea typeface="微軟正黑體" pitchFamily="34" charset="-120"/>
               </a:rPr>
               <a:t>誇十字架</a:t>
             </a:r>
-            <a:r>
-              <a:rPr lang="en-US" altLang="zh-CN" sz="4800" b="1" dirty="0">
-                <a:solidFill>
-                  <a:srgbClr val="002060"/>
-                </a:solidFill>
-                <a:latin typeface="Microsoft JhengHei" panose="020B0604030504040204" pitchFamily="34" charset="-120"/>
-                <a:ea typeface="Microsoft JhengHei" panose="020B0604030504040204" pitchFamily="34" charset="-120"/>
-              </a:rPr>
-              <a:t>】</a:t>
-            </a:r>
-          </a:p>
-        </p:txBody>
-      </p:sp>
-      <p:sp>
-        <p:nvSpPr>
-          <p:cNvPr id="5" name="Content Placeholder 4"/>
-          <p:cNvSpPr>
-            <a:spLocks noGrp="1"/>
-          </p:cNvSpPr>
-          <p:nvPr>
-            <p:ph idx="1"/>
-          </p:nvPr>
-        </p:nvSpPr>
-        <p:spPr/>
-        <p:txBody>
-          <a:bodyPr>
-            <a:normAutofit/>
-          </a:bodyPr>
-          <a:lstStyle/>
-          <a:p>
-            <a:pPr marL="0" indent="0" algn="ctr">
-              <a:buNone/>
-            </a:pPr>
-            <a:r>
-              <a:rPr lang="zh-TW" altLang="en-US" sz="5400" b="1" dirty="0">
-                <a:solidFill>
-                  <a:srgbClr val="002060"/>
-                </a:solidFill>
-                <a:latin typeface="Microsoft JhengHei" panose="020B0604030504040204" pitchFamily="34" charset="-120"/>
-                <a:ea typeface="Microsoft JhengHei" panose="020B0604030504040204" pitchFamily="34" charset="-120"/>
-              </a:rPr>
-              <a:t>我每仰望十字寶架</a:t>
-            </a:r>
-          </a:p>
-          <a:p>
-            <a:pPr marL="0" indent="0" algn="ctr">
-              <a:buNone/>
-            </a:pPr>
-            <a:r>
-              <a:rPr lang="zh-TW" altLang="en-US" sz="5400" b="1" dirty="0">
-                <a:solidFill>
-                  <a:srgbClr val="002060"/>
-                </a:solidFill>
-                <a:latin typeface="Microsoft JhengHei" panose="020B0604030504040204" pitchFamily="34" charset="-120"/>
-                <a:ea typeface="Microsoft JhengHei" panose="020B0604030504040204" pitchFamily="34" charset="-120"/>
-              </a:rPr>
-              <a:t>榮耀救主在上捨身</a:t>
-            </a:r>
-          </a:p>
-          <a:p>
-            <a:pPr marL="0" indent="0" algn="ctr">
-              <a:buNone/>
-            </a:pPr>
-            <a:r>
-              <a:rPr lang="zh-TW" altLang="en-US" sz="5400" b="1" dirty="0">
-                <a:solidFill>
-                  <a:srgbClr val="002060"/>
-                </a:solidFill>
-                <a:latin typeface="Microsoft JhengHei" panose="020B0604030504040204" pitchFamily="34" charset="-120"/>
-                <a:ea typeface="Microsoft JhengHei" panose="020B0604030504040204" pitchFamily="34" charset="-120"/>
-              </a:rPr>
-              <a:t>從前所有世上榮華</a:t>
-            </a:r>
-          </a:p>
-          <a:p>
-            <a:pPr marL="0" indent="0" algn="ctr">
-              <a:buNone/>
-            </a:pPr>
-            <a:r>
-              <a:rPr lang="zh-TW" altLang="en-US" sz="5400" b="1" dirty="0">
-                <a:solidFill>
-                  <a:srgbClr val="002060"/>
-                </a:solidFill>
-                <a:latin typeface="Microsoft JhengHei" panose="020B0604030504040204" pitchFamily="34" charset="-120"/>
-                <a:ea typeface="Microsoft JhengHei" panose="020B0604030504040204" pitchFamily="34" charset="-120"/>
-              </a:rPr>
-              <a:t>今願為主一齊丟盡</a:t>
-            </a:r>
-          </a:p>
-        </p:txBody>
-      </p:sp>
-      <p:sp>
-        <p:nvSpPr>
-          <p:cNvPr id="6" name="Text Box 1"/>
-          <p:cNvSpPr txBox="1"/>
-          <p:nvPr/>
-        </p:nvSpPr>
-        <p:spPr>
-          <a:xfrm>
-            <a:off x="1415480" y="1772816"/>
-            <a:ext cx="1380490" cy="830997"/>
-          </a:xfrm>
-          <a:prstGeom prst="rect">
-            <a:avLst/>
-          </a:prstGeom>
-          <a:noFill/>
-          <a:ln w="9525">
-            <a:noFill/>
-            <a:miter lim="800000"/>
-          </a:ln>
-        </p:spPr>
-        <p:txBody>
-          <a:bodyPr wrap="square">
-            <a:spAutoFit/>
-          </a:bodyPr>
-          <a:lstStyle/>
-          <a:p>
-            <a:pPr algn="ctr"/>
-            <a:r>
-              <a:rPr lang="en-US" sz="4800" b="1" dirty="0">
-                <a:solidFill>
-                  <a:srgbClr val="002060"/>
-                </a:solidFill>
-              </a:rPr>
-              <a:t>1.</a:t>
-            </a:r>
+            <a:endParaRPr lang="zh-TW" altLang="en-US" sz="8000" b="1" dirty="0">
+              <a:solidFill>
+                <a:srgbClr val="000066"/>
+              </a:solidFill>
+              <a:effectLst>
+                <a:outerShdw blurRad="38100" dist="38100" dir="2700000" algn="tl">
+                  <a:srgbClr val="000000">
+                    <a:alpha val="43137"/>
+                  </a:srgbClr>
+                </a:outerShdw>
+              </a:effectLst>
+              <a:latin typeface="微軟正黑體" pitchFamily="34" charset="-120"/>
+              <a:ea typeface="微軟正黑體" pitchFamily="34" charset="-120"/>
+            </a:endParaRPr>
           </a:p>
         </p:txBody>
       </p:sp>
     </p:spTree>
     <p:extLst>
       <p:ext uri="{BB962C8B-B14F-4D97-AF65-F5344CB8AC3E}">
-        <p14:creationId xmlns:p14="http://schemas.microsoft.com/office/powerpoint/2010/main" val="1640588648"/>
+        <p14:creationId xmlns:p14="http://schemas.microsoft.com/office/powerpoint/2010/main" val="3724263107"/>
       </p:ext>
     </p:extLst>
   </p:cSld>
@@ -3916,170 +3863,91 @@
       </p:grpSpPr>
       <p:sp>
         <p:nvSpPr>
-          <p:cNvPr id="4" name="Title 3"/>
-          <p:cNvSpPr>
-            <a:spLocks noGrp="1"/>
-          </p:cNvSpPr>
-          <p:nvPr>
-            <p:ph type="title"/>
-          </p:nvPr>
-        </p:nvSpPr>
-        <p:spPr/>
-        <p:txBody>
-          <a:bodyPr>
+          <p:cNvPr id="5" name="內容版面配置區 4"/>
+          <p:cNvSpPr>
+            <a:spLocks noGrp="1"/>
+          </p:cNvSpPr>
+          <p:nvPr>
+            <p:ph idx="1"/>
+          </p:nvPr>
+        </p:nvSpPr>
+        <p:spPr>
+          <a:xfrm>
+            <a:off x="0" y="2084851"/>
+            <a:ext cx="12192000" cy="2404863"/>
+          </a:xfrm>
+        </p:spPr>
+        <p:txBody>
+          <a:bodyPr anchor="ctr">
             <a:normAutofit/>
           </a:bodyPr>
           <a:lstStyle/>
           <a:p>
-            <a:r>
-              <a:rPr lang="en-US" altLang="zh-CN" sz="4800" b="1" dirty="0">
+            <a:pPr marL="0" indent="0" algn="ctr">
+              <a:buNone/>
+            </a:pPr>
+            <a:r>
+              <a:rPr lang="zh-TW" altLang="en-US" sz="6400" b="1" dirty="0">
                 <a:solidFill>
-                  <a:srgbClr val="002060"/>
+                  <a:srgbClr val="000066"/>
                 </a:solidFill>
                 <a:latin typeface="Microsoft JhengHei" panose="020B0604030504040204" pitchFamily="34" charset="-120"/>
                 <a:ea typeface="Microsoft JhengHei" panose="020B0604030504040204" pitchFamily="34" charset="-120"/>
               </a:rPr>
-              <a:t>【</a:t>
-            </a:r>
-            <a:r>
-              <a:rPr lang="zh-CN" altLang="en-US" sz="4800" b="1" dirty="0">
+              <a:t>我每仰望十字寶架</a:t>
+            </a:r>
+          </a:p>
+          <a:p>
+            <a:pPr marL="0" indent="0" algn="ctr">
+              <a:buNone/>
+            </a:pPr>
+            <a:r>
+              <a:rPr lang="zh-TW" altLang="en-US" sz="6400" b="1" dirty="0">
                 <a:solidFill>
-                  <a:srgbClr val="002060"/>
+                  <a:srgbClr val="000066"/>
                 </a:solidFill>
                 <a:latin typeface="Microsoft JhengHei" panose="020B0604030504040204" pitchFamily="34" charset="-120"/>
                 <a:ea typeface="Microsoft JhengHei" panose="020B0604030504040204" pitchFamily="34" charset="-120"/>
               </a:rPr>
-              <a:t>誇十字架</a:t>
-            </a:r>
-            <a:r>
-              <a:rPr lang="en-US" altLang="zh-CN" sz="4800" b="1" dirty="0">
-                <a:solidFill>
-                  <a:srgbClr val="002060"/>
-                </a:solidFill>
-                <a:latin typeface="Microsoft JhengHei" panose="020B0604030504040204" pitchFamily="34" charset="-120"/>
-                <a:ea typeface="Microsoft JhengHei" panose="020B0604030504040204" pitchFamily="34" charset="-120"/>
-              </a:rPr>
-              <a:t>】</a:t>
-            </a:r>
-          </a:p>
-        </p:txBody>
-      </p:sp>
-      <p:sp>
-        <p:nvSpPr>
-          <p:cNvPr id="5" name="Content Placeholder 4"/>
-          <p:cNvSpPr>
-            <a:spLocks noGrp="1"/>
-          </p:cNvSpPr>
-          <p:nvPr>
-            <p:ph idx="1"/>
-          </p:nvPr>
-        </p:nvSpPr>
-        <p:spPr/>
-        <p:txBody>
-          <a:bodyPr>
-            <a:normAutofit/>
-          </a:bodyPr>
-          <a:lstStyle/>
-          <a:p>
-            <a:pPr marL="0" indent="0" algn="ctr">
-              <a:buNone/>
-            </a:pPr>
-            <a:r>
-              <a:rPr lang="zh-TW" altLang="en-US" sz="5400" b="1" dirty="0">
-                <a:solidFill>
-                  <a:srgbClr val="002060"/>
-                </a:solidFill>
-                <a:latin typeface="Microsoft JhengHei" panose="020B0604030504040204" pitchFamily="34" charset="-120"/>
-                <a:ea typeface="Microsoft JhengHei" panose="020B0604030504040204" pitchFamily="34" charset="-120"/>
-              </a:rPr>
-              <a:t>求主禁我別有誇耀</a:t>
-            </a:r>
-          </a:p>
-          <a:p>
-            <a:pPr marL="0" indent="0" algn="ctr">
-              <a:buNone/>
-            </a:pPr>
-            <a:r>
-              <a:rPr lang="zh-TW" altLang="en-US" sz="5400" b="1" dirty="0">
-                <a:solidFill>
-                  <a:srgbClr val="002060"/>
-                </a:solidFill>
-                <a:latin typeface="Microsoft JhengHei" panose="020B0604030504040204" pitchFamily="34" charset="-120"/>
-                <a:ea typeface="Microsoft JhengHei" panose="020B0604030504040204" pitchFamily="34" charset="-120"/>
-              </a:rPr>
-              <a:t>但跨我主在十字架</a:t>
-            </a:r>
-          </a:p>
-          <a:p>
-            <a:pPr marL="0" indent="0" algn="ctr">
-              <a:buNone/>
-            </a:pPr>
-            <a:r>
-              <a:rPr lang="zh-TW" altLang="en-US" sz="5400" b="1" dirty="0">
-                <a:solidFill>
-                  <a:srgbClr val="002060"/>
-                </a:solidFill>
-                <a:latin typeface="Microsoft JhengHei" panose="020B0604030504040204" pitchFamily="34" charset="-120"/>
-                <a:ea typeface="Microsoft JhengHei" panose="020B0604030504040204" pitchFamily="34" charset="-120"/>
-              </a:rPr>
-              <a:t>世間所有虛空福祉</a:t>
-            </a:r>
-          </a:p>
-          <a:p>
-            <a:pPr marL="0" indent="0" algn="ctr">
-              <a:buNone/>
-            </a:pPr>
-            <a:r>
-              <a:rPr lang="zh-TW" altLang="en-US" sz="5400" b="1" dirty="0">
-                <a:solidFill>
-                  <a:srgbClr val="002060"/>
-                </a:solidFill>
-                <a:latin typeface="Microsoft JhengHei" panose="020B0604030504040204" pitchFamily="34" charset="-120"/>
-                <a:ea typeface="Microsoft JhengHei" panose="020B0604030504040204" pitchFamily="34" charset="-120"/>
-              </a:rPr>
-              <a:t>為主寶血情願丟下</a:t>
-            </a:r>
-          </a:p>
-        </p:txBody>
-      </p:sp>
-      <p:sp>
-        <p:nvSpPr>
-          <p:cNvPr id="6" name="Text Box 1"/>
+              <a:t>榮耀救主在上捨身</a:t>
+            </a:r>
+          </a:p>
+        </p:txBody>
+      </p:sp>
+      <p:sp>
+        <p:nvSpPr>
+          <p:cNvPr id="3" name="TextBox 2"/>
           <p:cNvSpPr txBox="1"/>
           <p:nvPr/>
         </p:nvSpPr>
         <p:spPr>
           <a:xfrm>
-            <a:off x="1415480" y="1772816"/>
-            <a:ext cx="1380490" cy="830997"/>
+            <a:off x="0" y="5061181"/>
+            <a:ext cx="12192000" cy="666786"/>
           </a:xfrm>
           <a:prstGeom prst="rect">
             <a:avLst/>
           </a:prstGeom>
           <a:noFill/>
-          <a:ln w="9525">
-            <a:noFill/>
-            <a:miter lim="800000"/>
-          </a:ln>
         </p:spPr>
         <p:txBody>
-          <a:bodyPr wrap="square">
+          <a:bodyPr wrap="square" rtlCol="0">
             <a:spAutoFit/>
           </a:bodyPr>
           <a:lstStyle/>
           <a:p>
             <a:pPr algn="ctr"/>
             <a:r>
-              <a:rPr lang="en-US" sz="4800" b="1" dirty="0" smtClean="0">
+              <a:rPr lang="en-US" sz="3733" b="1" dirty="0">
                 <a:solidFill>
-                  <a:srgbClr val="002060"/>
+                  <a:srgbClr val="000066"/>
                 </a:solidFill>
               </a:rPr>
-              <a:t>2.</a:t>
-            </a:r>
-            <a:endParaRPr lang="en-US" sz="4800" b="1" dirty="0">
+              <a:t>( 1 / 4 )</a:t>
+            </a:r>
+            <a:endParaRPr lang="vi-VN" sz="3733" b="1" dirty="0">
               <a:solidFill>
-                <a:srgbClr val="002060"/>
+                <a:srgbClr val="000066"/>
               </a:solidFill>
             </a:endParaRPr>
           </a:p>
@@ -4088,7 +3956,7 @@
     </p:spTree>
     <p:extLst>
       <p:ext uri="{BB962C8B-B14F-4D97-AF65-F5344CB8AC3E}">
-        <p14:creationId xmlns:p14="http://schemas.microsoft.com/office/powerpoint/2010/main" val="1556170326"/>
+        <p14:creationId xmlns:p14="http://schemas.microsoft.com/office/powerpoint/2010/main" val="1407003638"/>
       </p:ext>
     </p:extLst>
   </p:cSld>
@@ -4117,178 +3985,91 @@
       </p:grpSpPr>
       <p:sp>
         <p:nvSpPr>
-          <p:cNvPr id="4" name="Title 3"/>
-          <p:cNvSpPr>
-            <a:spLocks noGrp="1"/>
-          </p:cNvSpPr>
-          <p:nvPr>
-            <p:ph type="title"/>
-          </p:nvPr>
-        </p:nvSpPr>
-        <p:spPr/>
-        <p:txBody>
-          <a:bodyPr>
+          <p:cNvPr id="5" name="內容版面配置區 4"/>
+          <p:cNvSpPr>
+            <a:spLocks noGrp="1"/>
+          </p:cNvSpPr>
+          <p:nvPr>
+            <p:ph idx="1"/>
+          </p:nvPr>
+        </p:nvSpPr>
+        <p:spPr>
+          <a:xfrm>
+            <a:off x="0" y="2084851"/>
+            <a:ext cx="12192000" cy="2404863"/>
+          </a:xfrm>
+        </p:spPr>
+        <p:txBody>
+          <a:bodyPr anchor="ctr">
             <a:normAutofit/>
           </a:bodyPr>
           <a:lstStyle/>
           <a:p>
-            <a:r>
-              <a:rPr lang="en-US" altLang="zh-CN" sz="4800" b="1" dirty="0">
+            <a:pPr marL="0" indent="0" algn="ctr">
+              <a:buNone/>
+            </a:pPr>
+            <a:r>
+              <a:rPr lang="zh-TW" altLang="en-US" sz="6400" b="1" dirty="0">
                 <a:solidFill>
-                  <a:srgbClr val="002060"/>
+                  <a:srgbClr val="000066"/>
                 </a:solidFill>
                 <a:latin typeface="Microsoft JhengHei" panose="020B0604030504040204" pitchFamily="34" charset="-120"/>
                 <a:ea typeface="Microsoft JhengHei" panose="020B0604030504040204" pitchFamily="34" charset="-120"/>
               </a:rPr>
-              <a:t>【</a:t>
-            </a:r>
-            <a:r>
-              <a:rPr lang="zh-CN" altLang="en-US" sz="4800" b="1" dirty="0">
+              <a:t>從前所有世上榮華</a:t>
+            </a:r>
+          </a:p>
+          <a:p>
+            <a:pPr marL="0" indent="0" algn="ctr">
+              <a:buNone/>
+            </a:pPr>
+            <a:r>
+              <a:rPr lang="zh-TW" altLang="en-US" sz="6400" b="1" dirty="0">
                 <a:solidFill>
-                  <a:srgbClr val="002060"/>
+                  <a:srgbClr val="000066"/>
                 </a:solidFill>
                 <a:latin typeface="Microsoft JhengHei" panose="020B0604030504040204" pitchFamily="34" charset="-120"/>
                 <a:ea typeface="Microsoft JhengHei" panose="020B0604030504040204" pitchFamily="34" charset="-120"/>
               </a:rPr>
-              <a:t>誇十字架</a:t>
-            </a:r>
-            <a:r>
-              <a:rPr lang="en-US" altLang="zh-CN" sz="4800" b="1" dirty="0">
-                <a:solidFill>
-                  <a:srgbClr val="002060"/>
-                </a:solidFill>
-                <a:latin typeface="Microsoft JhengHei" panose="020B0604030504040204" pitchFamily="34" charset="-120"/>
-                <a:ea typeface="Microsoft JhengHei" panose="020B0604030504040204" pitchFamily="34" charset="-120"/>
-              </a:rPr>
-              <a:t>】</a:t>
-            </a:r>
-          </a:p>
-        </p:txBody>
-      </p:sp>
-      <p:sp>
-        <p:nvSpPr>
-          <p:cNvPr id="5" name="Content Placeholder 4"/>
-          <p:cNvSpPr>
-            <a:spLocks noGrp="1"/>
-          </p:cNvSpPr>
-          <p:nvPr>
-            <p:ph idx="1"/>
-          </p:nvPr>
-        </p:nvSpPr>
-        <p:spPr/>
-        <p:txBody>
-          <a:bodyPr>
-            <a:normAutofit/>
-          </a:bodyPr>
-          <a:lstStyle/>
-          <a:p>
-            <a:pPr marL="0" indent="0" algn="ctr">
-              <a:buNone/>
-            </a:pPr>
-            <a:r>
-              <a:rPr lang="zh-TW" altLang="en-US" sz="5400" b="1" dirty="0">
-                <a:solidFill>
-                  <a:srgbClr val="002060"/>
-                </a:solidFill>
-                <a:latin typeface="Microsoft JhengHei" panose="020B0604030504040204" pitchFamily="34" charset="-120"/>
-                <a:ea typeface="Microsoft JhengHei" panose="020B0604030504040204" pitchFamily="34" charset="-120"/>
-              </a:rPr>
-              <a:t>請看主頭主手主足</a:t>
-            </a:r>
-          </a:p>
-          <a:p>
-            <a:pPr marL="0" indent="0" algn="ctr">
-              <a:buNone/>
-            </a:pPr>
-            <a:r>
-              <a:rPr lang="zh-TW" altLang="en-US" sz="5400" b="1" dirty="0">
-                <a:solidFill>
-                  <a:srgbClr val="002060"/>
-                </a:solidFill>
-                <a:latin typeface="Microsoft JhengHei" panose="020B0604030504040204" pitchFamily="34" charset="-120"/>
-                <a:ea typeface="Microsoft JhengHei" panose="020B0604030504040204" pitchFamily="34" charset="-120"/>
-              </a:rPr>
-              <a:t>憂愁慈愛和血同流</a:t>
-            </a:r>
-          </a:p>
-          <a:p>
-            <a:pPr marL="0" indent="0" algn="ctr">
-              <a:buNone/>
-            </a:pPr>
-            <a:r>
-              <a:rPr lang="zh-TW" altLang="en-US" sz="5400" b="1" dirty="0">
-                <a:solidFill>
-                  <a:srgbClr val="002060"/>
-                </a:solidFill>
-                <a:latin typeface="Microsoft JhengHei" panose="020B0604030504040204" pitchFamily="34" charset="-120"/>
-                <a:ea typeface="Microsoft JhengHei" panose="020B0604030504040204" pitchFamily="34" charset="-120"/>
-              </a:rPr>
-              <a:t>這樣大愛自古未有</a:t>
-            </a:r>
-          </a:p>
-          <a:p>
-            <a:pPr marL="0" indent="0" algn="ctr">
-              <a:buNone/>
-            </a:pPr>
-            <a:r>
-              <a:rPr lang="zh-TW" altLang="en-US" sz="5400" b="1" dirty="0">
-                <a:solidFill>
-                  <a:srgbClr val="002060"/>
-                </a:solidFill>
-                <a:latin typeface="Microsoft JhengHei" panose="020B0604030504040204" pitchFamily="34" charset="-120"/>
-                <a:ea typeface="Microsoft JhengHei" panose="020B0604030504040204" pitchFamily="34" charset="-120"/>
-              </a:rPr>
-              <a:t>荊棘反成榮耀冕旒</a:t>
-            </a:r>
-          </a:p>
-        </p:txBody>
-      </p:sp>
-      <p:sp>
-        <p:nvSpPr>
-          <p:cNvPr id="6" name="Text Box 1"/>
+              <a:t>今願為主一齊丟盡</a:t>
+            </a:r>
+          </a:p>
+        </p:txBody>
+      </p:sp>
+      <p:sp>
+        <p:nvSpPr>
+          <p:cNvPr id="3" name="TextBox 2"/>
           <p:cNvSpPr txBox="1"/>
           <p:nvPr/>
         </p:nvSpPr>
         <p:spPr>
           <a:xfrm>
-            <a:off x="1415480" y="1772816"/>
-            <a:ext cx="1380490" cy="830997"/>
+            <a:off x="0" y="5061181"/>
+            <a:ext cx="12192000" cy="666786"/>
           </a:xfrm>
           <a:prstGeom prst="rect">
             <a:avLst/>
           </a:prstGeom>
           <a:noFill/>
-          <a:ln w="9525">
-            <a:noFill/>
-            <a:miter lim="800000"/>
-          </a:ln>
         </p:spPr>
         <p:txBody>
-          <a:bodyPr wrap="square">
+          <a:bodyPr wrap="square" rtlCol="0">
             <a:spAutoFit/>
           </a:bodyPr>
           <a:lstStyle/>
           <a:p>
             <a:pPr algn="ctr"/>
             <a:r>
-              <a:rPr lang="en-US" sz="4800" b="1" dirty="0">
+              <a:rPr lang="en-US" sz="3733" b="1" dirty="0">
                 <a:solidFill>
-                  <a:srgbClr val="002060"/>
+                  <a:srgbClr val="000066"/>
                 </a:solidFill>
               </a:rPr>
-              <a:t>3</a:t>
-            </a:r>
-            <a:r>
-              <a:rPr lang="en-US" sz="4800" b="1" dirty="0" smtClean="0">
-                <a:solidFill>
-                  <a:srgbClr val="002060"/>
-                </a:solidFill>
-              </a:rPr>
-              <a:t>.</a:t>
-            </a:r>
-            <a:endParaRPr lang="en-US" sz="4800" b="1" dirty="0">
+              <a:t>( 1 / 4 )</a:t>
+            </a:r>
+            <a:endParaRPr lang="vi-VN" sz="3733" b="1" dirty="0">
               <a:solidFill>
-                <a:srgbClr val="002060"/>
+                <a:srgbClr val="000066"/>
               </a:solidFill>
             </a:endParaRPr>
           </a:p>
@@ -4297,7 +4078,7 @@
     </p:spTree>
     <p:extLst>
       <p:ext uri="{BB962C8B-B14F-4D97-AF65-F5344CB8AC3E}">
-        <p14:creationId xmlns:p14="http://schemas.microsoft.com/office/powerpoint/2010/main" val="1968465525"/>
+        <p14:creationId xmlns:p14="http://schemas.microsoft.com/office/powerpoint/2010/main" val="2047125440"/>
       </p:ext>
     </p:extLst>
   </p:cSld>
@@ -4326,57 +4107,251 @@
       </p:grpSpPr>
       <p:sp>
         <p:nvSpPr>
-          <p:cNvPr id="4" name="Title 3"/>
-          <p:cNvSpPr>
-            <a:spLocks noGrp="1"/>
-          </p:cNvSpPr>
-          <p:nvPr>
-            <p:ph type="title"/>
-          </p:nvPr>
-        </p:nvSpPr>
-        <p:spPr/>
-        <p:txBody>
-          <a:bodyPr>
+          <p:cNvPr id="5" name="內容版面配置區 4"/>
+          <p:cNvSpPr>
+            <a:spLocks noGrp="1"/>
+          </p:cNvSpPr>
+          <p:nvPr>
+            <p:ph idx="1"/>
+          </p:nvPr>
+        </p:nvSpPr>
+        <p:spPr>
+          <a:xfrm>
+            <a:off x="0" y="2084851"/>
+            <a:ext cx="12192000" cy="2404863"/>
+          </a:xfrm>
+        </p:spPr>
+        <p:txBody>
+          <a:bodyPr anchor="ctr">
             <a:normAutofit/>
           </a:bodyPr>
           <a:lstStyle/>
           <a:p>
-            <a:r>
-              <a:rPr lang="en-US" altLang="zh-CN" sz="4800" b="1" dirty="0">
+            <a:pPr marL="0" indent="0" algn="ctr">
+              <a:buNone/>
+            </a:pPr>
+            <a:r>
+              <a:rPr lang="zh-TW" altLang="en-US" sz="6400" b="1" dirty="0">
                 <a:solidFill>
-                  <a:srgbClr val="002060"/>
+                  <a:srgbClr val="000066"/>
                 </a:solidFill>
                 <a:latin typeface="Microsoft JhengHei" panose="020B0604030504040204" pitchFamily="34" charset="-120"/>
                 <a:ea typeface="Microsoft JhengHei" panose="020B0604030504040204" pitchFamily="34" charset="-120"/>
               </a:rPr>
-              <a:t>【</a:t>
-            </a:r>
-            <a:r>
-              <a:rPr lang="zh-CN" altLang="en-US" sz="4800" b="1" dirty="0">
+              <a:t>求主禁我別有誇耀</a:t>
+            </a:r>
+          </a:p>
+          <a:p>
+            <a:pPr marL="0" indent="0" algn="ctr">
+              <a:buNone/>
+            </a:pPr>
+            <a:r>
+              <a:rPr lang="zh-TW" altLang="en-US" sz="6400" b="1" dirty="0">
                 <a:solidFill>
-                  <a:srgbClr val="002060"/>
+                  <a:srgbClr val="000066"/>
                 </a:solidFill>
                 <a:latin typeface="Microsoft JhengHei" panose="020B0604030504040204" pitchFamily="34" charset="-120"/>
                 <a:ea typeface="Microsoft JhengHei" panose="020B0604030504040204" pitchFamily="34" charset="-120"/>
               </a:rPr>
-              <a:t>誇十字架</a:t>
-            </a:r>
-            <a:r>
-              <a:rPr lang="en-US" altLang="zh-CN" sz="4800" b="1" dirty="0">
+              <a:t>但跨我主在十字架</a:t>
+            </a:r>
+          </a:p>
+        </p:txBody>
+      </p:sp>
+      <p:sp>
+        <p:nvSpPr>
+          <p:cNvPr id="3" name="TextBox 2"/>
+          <p:cNvSpPr txBox="1"/>
+          <p:nvPr/>
+        </p:nvSpPr>
+        <p:spPr>
+          <a:xfrm>
+            <a:off x="0" y="5061181"/>
+            <a:ext cx="12192000" cy="666786"/>
+          </a:xfrm>
+          <a:prstGeom prst="rect">
+            <a:avLst/>
+          </a:prstGeom>
+          <a:noFill/>
+        </p:spPr>
+        <p:txBody>
+          <a:bodyPr wrap="square" rtlCol="0">
+            <a:spAutoFit/>
+          </a:bodyPr>
+          <a:lstStyle/>
+          <a:p>
+            <a:pPr algn="ctr"/>
+            <a:r>
+              <a:rPr lang="en-US" sz="3733" b="1" dirty="0">
                 <a:solidFill>
-                  <a:srgbClr val="002060"/>
+                  <a:srgbClr val="000066"/>
+                </a:solidFill>
+              </a:rPr>
+              <a:t>( 2 / 4 )</a:t>
+            </a:r>
+            <a:endParaRPr lang="vi-VN" sz="3733" b="1" dirty="0">
+              <a:solidFill>
+                <a:srgbClr val="000066"/>
+              </a:solidFill>
+            </a:endParaRPr>
+          </a:p>
+        </p:txBody>
+      </p:sp>
+    </p:spTree>
+    <p:extLst>
+      <p:ext uri="{BB962C8B-B14F-4D97-AF65-F5344CB8AC3E}">
+        <p14:creationId xmlns:p14="http://schemas.microsoft.com/office/powerpoint/2010/main" val="3603207601"/>
+      </p:ext>
+    </p:extLst>
+  </p:cSld>
+  <p:clrMapOvr>
+    <a:masterClrMapping/>
+  </p:clrMapOvr>
+</p:sld>
+</file>
+
+<file path=ppt/slides/slide5.xml><?xml version="1.0" encoding="utf-8"?>
+<p:sld xmlns:a="http://schemas.openxmlformats.org/drawingml/2006/main" xmlns:r="http://schemas.openxmlformats.org/officeDocument/2006/relationships" xmlns:p="http://schemas.openxmlformats.org/presentationml/2006/main">
+  <p:cSld>
+    <p:spTree>
+      <p:nvGrpSpPr>
+        <p:cNvPr id="1" name=""/>
+        <p:cNvGrpSpPr/>
+        <p:nvPr/>
+      </p:nvGrpSpPr>
+      <p:grpSpPr>
+        <a:xfrm>
+          <a:off x="0" y="0"/>
+          <a:ext cx="0" cy="0"/>
+          <a:chOff x="0" y="0"/>
+          <a:chExt cx="0" cy="0"/>
+        </a:xfrm>
+      </p:grpSpPr>
+      <p:sp>
+        <p:nvSpPr>
+          <p:cNvPr id="5" name="內容版面配置區 4"/>
+          <p:cNvSpPr>
+            <a:spLocks noGrp="1"/>
+          </p:cNvSpPr>
+          <p:nvPr>
+            <p:ph idx="1"/>
+          </p:nvPr>
+        </p:nvSpPr>
+        <p:spPr>
+          <a:xfrm>
+            <a:off x="0" y="2084851"/>
+            <a:ext cx="12192000" cy="2404863"/>
+          </a:xfrm>
+        </p:spPr>
+        <p:txBody>
+          <a:bodyPr anchor="ctr">
+            <a:normAutofit/>
+          </a:bodyPr>
+          <a:lstStyle/>
+          <a:p>
+            <a:pPr marL="0" indent="0" algn="ctr">
+              <a:buNone/>
+            </a:pPr>
+            <a:r>
+              <a:rPr lang="zh-TW" altLang="en-US" sz="6400" b="1" dirty="0">
+                <a:solidFill>
+                  <a:srgbClr val="000066"/>
                 </a:solidFill>
                 <a:latin typeface="Microsoft JhengHei" panose="020B0604030504040204" pitchFamily="34" charset="-120"/>
                 <a:ea typeface="Microsoft JhengHei" panose="020B0604030504040204" pitchFamily="34" charset="-120"/>
               </a:rPr>
-              <a:t>】</a:t>
-            </a:r>
-          </a:p>
-        </p:txBody>
-      </p:sp>
-      <p:sp>
-        <p:nvSpPr>
-          <p:cNvPr id="5" name="Content Placeholder 4"/>
+              <a:t>世間所有虛空福祉</a:t>
+            </a:r>
+          </a:p>
+          <a:p>
+            <a:pPr marL="0" indent="0" algn="ctr">
+              <a:buNone/>
+            </a:pPr>
+            <a:r>
+              <a:rPr lang="zh-TW" altLang="en-US" sz="6400" b="1" dirty="0">
+                <a:solidFill>
+                  <a:srgbClr val="000066"/>
+                </a:solidFill>
+                <a:latin typeface="Microsoft JhengHei" panose="020B0604030504040204" pitchFamily="34" charset="-120"/>
+                <a:ea typeface="Microsoft JhengHei" panose="020B0604030504040204" pitchFamily="34" charset="-120"/>
+              </a:rPr>
+              <a:t>為主寶血情願丟下</a:t>
+            </a:r>
+          </a:p>
+        </p:txBody>
+      </p:sp>
+      <p:sp>
+        <p:nvSpPr>
+          <p:cNvPr id="3" name="TextBox 2"/>
+          <p:cNvSpPr txBox="1"/>
+          <p:nvPr/>
+        </p:nvSpPr>
+        <p:spPr>
+          <a:xfrm>
+            <a:off x="0" y="5061181"/>
+            <a:ext cx="12192000" cy="666786"/>
+          </a:xfrm>
+          <a:prstGeom prst="rect">
+            <a:avLst/>
+          </a:prstGeom>
+          <a:noFill/>
+        </p:spPr>
+        <p:txBody>
+          <a:bodyPr wrap="square" rtlCol="0">
+            <a:spAutoFit/>
+          </a:bodyPr>
+          <a:lstStyle/>
+          <a:p>
+            <a:pPr algn="ctr"/>
+            <a:r>
+              <a:rPr lang="en-US" sz="3733" b="1" dirty="0">
+                <a:solidFill>
+                  <a:srgbClr val="000066"/>
+                </a:solidFill>
+              </a:rPr>
+              <a:t>( 2 / 4 )</a:t>
+            </a:r>
+            <a:endParaRPr lang="vi-VN" sz="3733" b="1" dirty="0">
+              <a:solidFill>
+                <a:srgbClr val="000066"/>
+              </a:solidFill>
+            </a:endParaRPr>
+          </a:p>
+        </p:txBody>
+      </p:sp>
+    </p:spTree>
+    <p:extLst>
+      <p:ext uri="{BB962C8B-B14F-4D97-AF65-F5344CB8AC3E}">
+        <p14:creationId xmlns:p14="http://schemas.microsoft.com/office/powerpoint/2010/main" val="1252019373"/>
+      </p:ext>
+    </p:extLst>
+  </p:cSld>
+  <p:clrMapOvr>
+    <a:masterClrMapping/>
+  </p:clrMapOvr>
+</p:sld>
+</file>
+
+<file path=ppt/slides/slide6.xml><?xml version="1.0" encoding="utf-8"?>
+<p:sld xmlns:a="http://schemas.openxmlformats.org/drawingml/2006/main" xmlns:r="http://schemas.openxmlformats.org/officeDocument/2006/relationships" xmlns:p="http://schemas.openxmlformats.org/presentationml/2006/main">
+  <p:cSld>
+    <p:spTree>
+      <p:nvGrpSpPr>
+        <p:cNvPr id="1" name=""/>
+        <p:cNvGrpSpPr/>
+        <p:nvPr/>
+      </p:nvGrpSpPr>
+      <p:grpSpPr>
+        <a:xfrm>
+          <a:off x="0" y="0"/>
+          <a:ext cx="0" cy="0"/>
+          <a:chOff x="0" y="0"/>
+          <a:chExt cx="0" cy="0"/>
+        </a:xfrm>
+      </p:grpSpPr>
+      <p:sp>
+        <p:nvSpPr>
+          <p:cNvPr id="5" name="內容版面配置區 4"/>
           <p:cNvSpPr>
             <a:spLocks noGrp="1"/>
           </p:cNvSpPr>
@@ -4384,9 +4359,14 @@
             <p:ph idx="1"/>
           </p:nvPr>
         </p:nvSpPr>
-        <p:spPr/>
-        <p:txBody>
-          <a:bodyPr>
+        <p:spPr>
+          <a:xfrm>
+            <a:off x="0" y="2084851"/>
+            <a:ext cx="12192000" cy="2404863"/>
+          </a:xfrm>
+        </p:spPr>
+        <p:txBody>
+          <a:bodyPr anchor="ctr">
             <a:normAutofit/>
           </a:bodyPr>
           <a:lstStyle/>
@@ -4395,9 +4375,253 @@
               <a:buNone/>
             </a:pPr>
             <a:r>
-              <a:rPr lang="zh-TW" altLang="en-US" sz="5400" b="1" dirty="0">
+              <a:rPr lang="zh-TW" altLang="en-US" sz="6400" b="1" dirty="0">
                 <a:solidFill>
-                  <a:srgbClr val="002060"/>
+                  <a:srgbClr val="000066"/>
+                </a:solidFill>
+                <a:latin typeface="Microsoft JhengHei" panose="020B0604030504040204" pitchFamily="34" charset="-120"/>
+                <a:ea typeface="Microsoft JhengHei" panose="020B0604030504040204" pitchFamily="34" charset="-120"/>
+              </a:rPr>
+              <a:t>請看主頭主手主足</a:t>
+            </a:r>
+          </a:p>
+          <a:p>
+            <a:pPr marL="0" indent="0" algn="ctr">
+              <a:buNone/>
+            </a:pPr>
+            <a:r>
+              <a:rPr lang="zh-TW" altLang="en-US" sz="6400" b="1" dirty="0">
+                <a:solidFill>
+                  <a:srgbClr val="000066"/>
+                </a:solidFill>
+                <a:latin typeface="Microsoft JhengHei" panose="020B0604030504040204" pitchFamily="34" charset="-120"/>
+                <a:ea typeface="Microsoft JhengHei" panose="020B0604030504040204" pitchFamily="34" charset="-120"/>
+              </a:rPr>
+              <a:t>憂愁慈愛和血同流</a:t>
+            </a:r>
+          </a:p>
+        </p:txBody>
+      </p:sp>
+      <p:sp>
+        <p:nvSpPr>
+          <p:cNvPr id="3" name="TextBox 2"/>
+          <p:cNvSpPr txBox="1"/>
+          <p:nvPr/>
+        </p:nvSpPr>
+        <p:spPr>
+          <a:xfrm>
+            <a:off x="0" y="5061181"/>
+            <a:ext cx="12192000" cy="666786"/>
+          </a:xfrm>
+          <a:prstGeom prst="rect">
+            <a:avLst/>
+          </a:prstGeom>
+          <a:noFill/>
+        </p:spPr>
+        <p:txBody>
+          <a:bodyPr wrap="square" rtlCol="0">
+            <a:spAutoFit/>
+          </a:bodyPr>
+          <a:lstStyle/>
+          <a:p>
+            <a:pPr algn="ctr"/>
+            <a:r>
+              <a:rPr lang="en-US" sz="3733" b="1" dirty="0">
+                <a:solidFill>
+                  <a:srgbClr val="000066"/>
+                </a:solidFill>
+              </a:rPr>
+              <a:t>( 3 / 4 )</a:t>
+            </a:r>
+            <a:endParaRPr lang="vi-VN" sz="3733" b="1" dirty="0">
+              <a:solidFill>
+                <a:srgbClr val="000066"/>
+              </a:solidFill>
+            </a:endParaRPr>
+          </a:p>
+        </p:txBody>
+      </p:sp>
+    </p:spTree>
+    <p:extLst>
+      <p:ext uri="{BB962C8B-B14F-4D97-AF65-F5344CB8AC3E}">
+        <p14:creationId xmlns:p14="http://schemas.microsoft.com/office/powerpoint/2010/main" val="503564365"/>
+      </p:ext>
+    </p:extLst>
+  </p:cSld>
+  <p:clrMapOvr>
+    <a:masterClrMapping/>
+  </p:clrMapOvr>
+</p:sld>
+</file>
+
+<file path=ppt/slides/slide7.xml><?xml version="1.0" encoding="utf-8"?>
+<p:sld xmlns:a="http://schemas.openxmlformats.org/drawingml/2006/main" xmlns:r="http://schemas.openxmlformats.org/officeDocument/2006/relationships" xmlns:p="http://schemas.openxmlformats.org/presentationml/2006/main">
+  <p:cSld>
+    <p:spTree>
+      <p:nvGrpSpPr>
+        <p:cNvPr id="1" name=""/>
+        <p:cNvGrpSpPr/>
+        <p:nvPr/>
+      </p:nvGrpSpPr>
+      <p:grpSpPr>
+        <a:xfrm>
+          <a:off x="0" y="0"/>
+          <a:ext cx="0" cy="0"/>
+          <a:chOff x="0" y="0"/>
+          <a:chExt cx="0" cy="0"/>
+        </a:xfrm>
+      </p:grpSpPr>
+      <p:sp>
+        <p:nvSpPr>
+          <p:cNvPr id="5" name="內容版面配置區 4"/>
+          <p:cNvSpPr>
+            <a:spLocks noGrp="1"/>
+          </p:cNvSpPr>
+          <p:nvPr>
+            <p:ph idx="1"/>
+          </p:nvPr>
+        </p:nvSpPr>
+        <p:spPr>
+          <a:xfrm>
+            <a:off x="0" y="2084851"/>
+            <a:ext cx="12192000" cy="2404863"/>
+          </a:xfrm>
+        </p:spPr>
+        <p:txBody>
+          <a:bodyPr anchor="ctr">
+            <a:normAutofit/>
+          </a:bodyPr>
+          <a:lstStyle/>
+          <a:p>
+            <a:pPr marL="0" indent="0" algn="ctr">
+              <a:buNone/>
+            </a:pPr>
+            <a:r>
+              <a:rPr lang="zh-TW" altLang="en-US" sz="6400" b="1" dirty="0">
+                <a:solidFill>
+                  <a:srgbClr val="000066"/>
+                </a:solidFill>
+                <a:latin typeface="Microsoft JhengHei" panose="020B0604030504040204" pitchFamily="34" charset="-120"/>
+                <a:ea typeface="Microsoft JhengHei" panose="020B0604030504040204" pitchFamily="34" charset="-120"/>
+              </a:rPr>
+              <a:t>這樣大愛自古未有</a:t>
+            </a:r>
+          </a:p>
+          <a:p>
+            <a:pPr marL="0" indent="0" algn="ctr">
+              <a:buNone/>
+            </a:pPr>
+            <a:r>
+              <a:rPr lang="zh-TW" altLang="en-US" sz="6400" b="1" dirty="0">
+                <a:solidFill>
+                  <a:srgbClr val="000066"/>
+                </a:solidFill>
+                <a:latin typeface="Microsoft JhengHei" panose="020B0604030504040204" pitchFamily="34" charset="-120"/>
+                <a:ea typeface="Microsoft JhengHei" panose="020B0604030504040204" pitchFamily="34" charset="-120"/>
+              </a:rPr>
+              <a:t>荊棘反成榮耀冕旒</a:t>
+            </a:r>
+          </a:p>
+        </p:txBody>
+      </p:sp>
+      <p:sp>
+        <p:nvSpPr>
+          <p:cNvPr id="3" name="TextBox 2"/>
+          <p:cNvSpPr txBox="1"/>
+          <p:nvPr/>
+        </p:nvSpPr>
+        <p:spPr>
+          <a:xfrm>
+            <a:off x="0" y="5061181"/>
+            <a:ext cx="12192000" cy="666786"/>
+          </a:xfrm>
+          <a:prstGeom prst="rect">
+            <a:avLst/>
+          </a:prstGeom>
+          <a:noFill/>
+        </p:spPr>
+        <p:txBody>
+          <a:bodyPr wrap="square" rtlCol="0">
+            <a:spAutoFit/>
+          </a:bodyPr>
+          <a:lstStyle/>
+          <a:p>
+            <a:pPr algn="ctr"/>
+            <a:r>
+              <a:rPr lang="en-US" sz="3733" b="1" dirty="0">
+                <a:solidFill>
+                  <a:srgbClr val="000066"/>
+                </a:solidFill>
+              </a:rPr>
+              <a:t>( 3 / 4 )</a:t>
+            </a:r>
+            <a:endParaRPr lang="vi-VN" sz="3733" b="1" dirty="0">
+              <a:solidFill>
+                <a:srgbClr val="000066"/>
+              </a:solidFill>
+            </a:endParaRPr>
+          </a:p>
+        </p:txBody>
+      </p:sp>
+    </p:spTree>
+    <p:extLst>
+      <p:ext uri="{BB962C8B-B14F-4D97-AF65-F5344CB8AC3E}">
+        <p14:creationId xmlns:p14="http://schemas.microsoft.com/office/powerpoint/2010/main" val="3397431882"/>
+      </p:ext>
+    </p:extLst>
+  </p:cSld>
+  <p:clrMapOvr>
+    <a:masterClrMapping/>
+  </p:clrMapOvr>
+</p:sld>
+</file>
+
+<file path=ppt/slides/slide8.xml><?xml version="1.0" encoding="utf-8"?>
+<p:sld xmlns:a="http://schemas.openxmlformats.org/drawingml/2006/main" xmlns:r="http://schemas.openxmlformats.org/officeDocument/2006/relationships" xmlns:p="http://schemas.openxmlformats.org/presentationml/2006/main">
+  <p:cSld>
+    <p:spTree>
+      <p:nvGrpSpPr>
+        <p:cNvPr id="1" name=""/>
+        <p:cNvGrpSpPr/>
+        <p:nvPr/>
+      </p:nvGrpSpPr>
+      <p:grpSpPr>
+        <a:xfrm>
+          <a:off x="0" y="0"/>
+          <a:ext cx="0" cy="0"/>
+          <a:chOff x="0" y="0"/>
+          <a:chExt cx="0" cy="0"/>
+        </a:xfrm>
+      </p:grpSpPr>
+      <p:sp>
+        <p:nvSpPr>
+          <p:cNvPr id="5" name="內容版面配置區 4"/>
+          <p:cNvSpPr>
+            <a:spLocks noGrp="1"/>
+          </p:cNvSpPr>
+          <p:nvPr>
+            <p:ph idx="1"/>
+          </p:nvPr>
+        </p:nvSpPr>
+        <p:spPr>
+          <a:xfrm>
+            <a:off x="0" y="2084851"/>
+            <a:ext cx="12192000" cy="2404863"/>
+          </a:xfrm>
+        </p:spPr>
+        <p:txBody>
+          <a:bodyPr anchor="ctr">
+            <a:normAutofit/>
+          </a:bodyPr>
+          <a:lstStyle/>
+          <a:p>
+            <a:pPr marL="0" indent="0" algn="ctr">
+              <a:buNone/>
+            </a:pPr>
+            <a:r>
+              <a:rPr lang="zh-TW" altLang="en-US" sz="6400" b="1" dirty="0">
+                <a:solidFill>
+                  <a:srgbClr val="000066"/>
                 </a:solidFill>
                 <a:latin typeface="Microsoft JhengHei" panose="020B0604030504040204" pitchFamily="34" charset="-120"/>
                 <a:ea typeface="Microsoft JhengHei" panose="020B0604030504040204" pitchFamily="34" charset="-120"/>
@@ -4410,9 +4634,9 @@
               <a:buNone/>
             </a:pPr>
             <a:r>
-              <a:rPr lang="zh-TW" altLang="en-US" sz="5400" b="1" dirty="0">
+              <a:rPr lang="zh-TW" altLang="en-US" sz="6400" b="1" dirty="0">
                 <a:solidFill>
-                  <a:srgbClr val="002060"/>
+                  <a:srgbClr val="000066"/>
                 </a:solidFill>
                 <a:latin typeface="Microsoft JhengHei" panose="020B0604030504040204" pitchFamily="34" charset="-120"/>
                 <a:ea typeface="Microsoft JhengHei" panose="020B0604030504040204" pitchFamily="34" charset="-120"/>
@@ -4420,14 +4644,106 @@
               <a:t>盡獻與主何足報恩</a:t>
             </a:r>
           </a:p>
+        </p:txBody>
+      </p:sp>
+      <p:sp>
+        <p:nvSpPr>
+          <p:cNvPr id="3" name="TextBox 2"/>
+          <p:cNvSpPr txBox="1"/>
+          <p:nvPr/>
+        </p:nvSpPr>
+        <p:spPr>
+          <a:xfrm>
+            <a:off x="0" y="5061181"/>
+            <a:ext cx="12192000" cy="666786"/>
+          </a:xfrm>
+          <a:prstGeom prst="rect">
+            <a:avLst/>
+          </a:prstGeom>
+          <a:noFill/>
+        </p:spPr>
+        <p:txBody>
+          <a:bodyPr wrap="square" rtlCol="0">
+            <a:spAutoFit/>
+          </a:bodyPr>
+          <a:lstStyle/>
+          <a:p>
+            <a:pPr algn="ctr"/>
+            <a:r>
+              <a:rPr lang="en-US" sz="3733" b="1" dirty="0">
+                <a:solidFill>
+                  <a:srgbClr val="000066"/>
+                </a:solidFill>
+              </a:rPr>
+              <a:t>( 4 / 4 )</a:t>
+            </a:r>
+            <a:endParaRPr lang="vi-VN" sz="3733" b="1" dirty="0">
+              <a:solidFill>
+                <a:srgbClr val="000066"/>
+              </a:solidFill>
+            </a:endParaRPr>
+          </a:p>
+        </p:txBody>
+      </p:sp>
+    </p:spTree>
+    <p:extLst>
+      <p:ext uri="{BB962C8B-B14F-4D97-AF65-F5344CB8AC3E}">
+        <p14:creationId xmlns:p14="http://schemas.microsoft.com/office/powerpoint/2010/main" val="565101594"/>
+      </p:ext>
+    </p:extLst>
+  </p:cSld>
+  <p:clrMapOvr>
+    <a:masterClrMapping/>
+  </p:clrMapOvr>
+</p:sld>
+</file>
+
+<file path=ppt/slides/slide9.xml><?xml version="1.0" encoding="utf-8"?>
+<p:sld xmlns:a="http://schemas.openxmlformats.org/drawingml/2006/main" xmlns:r="http://schemas.openxmlformats.org/officeDocument/2006/relationships" xmlns:p="http://schemas.openxmlformats.org/presentationml/2006/main">
+  <p:cSld>
+    <p:spTree>
+      <p:nvGrpSpPr>
+        <p:cNvPr id="1" name=""/>
+        <p:cNvGrpSpPr/>
+        <p:nvPr/>
+      </p:nvGrpSpPr>
+      <p:grpSpPr>
+        <a:xfrm>
+          <a:off x="0" y="0"/>
+          <a:ext cx="0" cy="0"/>
+          <a:chOff x="0" y="0"/>
+          <a:chExt cx="0" cy="0"/>
+        </a:xfrm>
+      </p:grpSpPr>
+      <p:sp>
+        <p:nvSpPr>
+          <p:cNvPr id="5" name="內容版面配置區 4"/>
+          <p:cNvSpPr>
+            <a:spLocks noGrp="1"/>
+          </p:cNvSpPr>
+          <p:nvPr>
+            <p:ph idx="1"/>
+          </p:nvPr>
+        </p:nvSpPr>
+        <p:spPr>
+          <a:xfrm>
+            <a:off x="0" y="2084851"/>
+            <a:ext cx="12192000" cy="2404863"/>
+          </a:xfrm>
+        </p:spPr>
+        <p:txBody>
+          <a:bodyPr anchor="ctr">
+            <a:normAutofit/>
+          </a:bodyPr>
+          <a:lstStyle/>
           <a:p>
             <a:pPr marL="0" indent="0" algn="ctr">
               <a:buNone/>
             </a:pPr>
             <a:r>
-              <a:rPr lang="zh-TW" altLang="en-US" sz="5400" b="1" dirty="0">
+              <a:rPr lang="zh-TW" altLang="en-US" sz="6400" b="1" dirty="0">
                 <a:solidFill>
-                  <a:srgbClr val="002060"/>
+                  <a:srgbClr val="000066"/>
                 </a:solidFill>
                 <a:latin typeface="Microsoft JhengHei" panose="020B0604030504040204" pitchFamily="34" charset="-120"/>
                 <a:ea typeface="Microsoft JhengHei" panose="020B0604030504040204" pitchFamily="34" charset="-120"/>
@@ -4440,9 +4756,9 @@
               <a:buNone/>
             </a:pPr>
             <a:r>
-              <a:rPr lang="zh-TW" altLang="en-US" sz="5400" b="1" dirty="0">
+              <a:rPr lang="zh-TW" altLang="en-US" sz="6400" b="1" dirty="0">
                 <a:solidFill>
-                  <a:srgbClr val="002060"/>
+                  <a:srgbClr val="000066"/>
                 </a:solidFill>
                 <a:latin typeface="Microsoft JhengHei" panose="020B0604030504040204" pitchFamily="34" charset="-120"/>
                 <a:ea typeface="Microsoft JhengHei" panose="020B0604030504040204" pitchFamily="34" charset="-120"/>
@@ -4454,42 +4770,38 @@
       </p:sp>
       <p:sp>
         <p:nvSpPr>
-          <p:cNvPr id="6" name="Text Box 1"/>
+          <p:cNvPr id="3" name="TextBox 2"/>
           <p:cNvSpPr txBox="1"/>
           <p:nvPr/>
         </p:nvSpPr>
         <p:spPr>
           <a:xfrm>
-            <a:off x="1415480" y="1772816"/>
-            <a:ext cx="1380490" cy="830997"/>
+            <a:off x="0" y="5061181"/>
+            <a:ext cx="12192000" cy="666786"/>
           </a:xfrm>
           <a:prstGeom prst="rect">
             <a:avLst/>
           </a:prstGeom>
           <a:noFill/>
-          <a:ln w="9525">
-            <a:noFill/>
-            <a:miter lim="800000"/>
-          </a:ln>
         </p:spPr>
         <p:txBody>
-          <a:bodyPr wrap="square">
+          <a:bodyPr wrap="square" rtlCol="0">
             <a:spAutoFit/>
           </a:bodyPr>
           <a:lstStyle/>
           <a:p>
             <a:pPr algn="ctr"/>
             <a:r>
-              <a:rPr lang="en-US" sz="4800" b="1" dirty="0" smtClean="0">
+              <a:rPr lang="en-US" sz="3733" b="1" dirty="0">
                 <a:solidFill>
-                  <a:srgbClr val="002060"/>
+                  <a:srgbClr val="000066"/>
                 </a:solidFill>
               </a:rPr>
-              <a:t>4.</a:t>
-            </a:r>
-            <a:endParaRPr lang="en-US" sz="4800" b="1" dirty="0">
+              <a:t>( 4 / 4 )</a:t>
+            </a:r>
+            <a:endParaRPr lang="vi-VN" sz="3733" b="1" dirty="0">
               <a:solidFill>
-                <a:srgbClr val="002060"/>
+                <a:srgbClr val="000066"/>
               </a:solidFill>
             </a:endParaRPr>
           </a:p>
@@ -4498,7 +4810,7 @@
     </p:spTree>
     <p:extLst>
       <p:ext uri="{BB962C8B-B14F-4D97-AF65-F5344CB8AC3E}">
-        <p14:creationId xmlns:p14="http://schemas.microsoft.com/office/powerpoint/2010/main" val="1964683555"/>
+        <p14:creationId xmlns:p14="http://schemas.microsoft.com/office/powerpoint/2010/main" val="2788372754"/>
       </p:ext>
     </p:extLst>
   </p:cSld>
